--- a/Visualisations/Online_Retail_Analytics.pptx
+++ b/Visualisations/Online_Retail_Analytics.pptx
@@ -391,6 +391,44 @@
     </c:plotArea>
     <c:legend>
       <c:legendPos val="b"/>
+      <c:legendEntry>
+        <c:idx val="0"/>
+        <c:txPr>
+          <a:bodyPr rot="0" spcFirstLastPara="0" vertOverflow="ellipsis" vert="horz" wrap="square" anchor="ctr" anchorCtr="1"/>
+          <a:lstStyle/>
+          <a:p>
+            <a:pPr>
+              <a:defRPr lang="en-US" sz="1200" b="0" i="0" u="none" strike="noStrike" kern="1200" baseline="0">
+                <a:solidFill>
+                  <a:srgbClr val="212121"/>
+                </a:solidFill>
+                <a:latin typeface="+mn-lt"/>
+                <a:ea typeface="+mn-ea"/>
+                <a:cs typeface="+mn-cs"/>
+              </a:defRPr>
+            </a:pPr>
+          </a:p>
+        </c:txPr>
+      </c:legendEntry>
+      <c:legendEntry>
+        <c:idx val="1"/>
+        <c:txPr>
+          <a:bodyPr rot="0" spcFirstLastPara="0" vertOverflow="ellipsis" vert="horz" wrap="square" anchor="ctr" anchorCtr="1"/>
+          <a:lstStyle/>
+          <a:p>
+            <a:pPr>
+              <a:defRPr lang="en-US" sz="1200" b="0" i="0" u="none" strike="noStrike" kern="1200" baseline="0">
+                <a:solidFill>
+                  <a:srgbClr val="212121"/>
+                </a:solidFill>
+                <a:latin typeface="+mn-lt"/>
+                <a:ea typeface="+mn-ea"/>
+                <a:cs typeface="+mn-cs"/>
+              </a:defRPr>
+            </a:pPr>
+          </a:p>
+        </c:txPr>
+      </c:legendEntry>
       <c:layout/>
       <c:overlay val="0"/>
       <c:txPr>
@@ -431,7 +469,7 @@
     <a:lstStyle/>
     <a:p>
       <a:pPr>
-        <a:defRPr lang="en-US"/>
+        <a:defRPr lang="en-US" b="0"/>
       </a:pPr>
     </a:p>
   </c:txPr>
@@ -8477,7 +8515,7 @@
                 <a:ea typeface="Calibri" panose="020F0502020204030204" pitchFamily="34" charset="-122"/>
                 <a:cs typeface="Calibri" panose="020F0502020204030204" pitchFamily="34" charset="-120"/>
               </a:rPr>
-              <a:t>An 8-page Power BI report — 4 pages per stakeholder — backed by a SQL Server star schema, published to GitHub as a portfolio artifact I can defend in an interview.</a:t>
+              <a:t>An 8-page Power BI report — 4 pages per stakeholder — backed by a SQL Server star schema, published to GitHub as a portfolio artifact</a:t>
             </a:r>
             <a:endParaRPr lang="en-US" sz="1250" dirty="0"/>
           </a:p>
@@ -9432,27 +9470,7 @@
                 <a:ea typeface="Calibri" panose="020F0502020204030204" pitchFamily="34" charset="-122"/>
                 <a:cs typeface="Calibri" panose="020F0502020204030204" pitchFamily="34" charset="-120"/>
               </a:rPr>
-              <a:t>CEO tier + CMO tier,</a:t>
-            </a:r>
-            <a:endParaRPr lang="en-US" sz="950" dirty="0"/>
-          </a:p>
-          <a:p>
-            <a:pPr marL="0" indent="0" algn="ctr">
-              <a:lnSpc>
-                <a:spcPts val="1200"/>
-              </a:lnSpc>
-              <a:buNone/>
-            </a:pPr>
-            <a:r>
-              <a:rPr lang="en-US" sz="950" dirty="0">
-                <a:solidFill>
-                  <a:srgbClr val="212121"/>
-                </a:solidFill>
-                <a:latin typeface="Calibri" panose="020F0502020204030204" pitchFamily="34" charset="0"/>
-                <a:ea typeface="Calibri" panose="020F0502020204030204" pitchFamily="34" charset="-122"/>
-                <a:cs typeface="Calibri" panose="020F0502020204030204" pitchFamily="34" charset="-120"/>
-              </a:rPr>
-              <a:t>interview-ready</a:t>
+              <a:t>CEO tier + CMO tier</a:t>
             </a:r>
             <a:endParaRPr lang="en-US" sz="950" dirty="0"/>
           </a:p>
